--- a/Week05/IntroductionToCss.pptx
+++ b/Week05/IntroductionToCss.pptx
@@ -5858,7 +5858,7 @@
           <a:p>
             <a:fld id="{5958763E-B898-436D-883D-03711491D54A}" type="datetimeFigureOut">
               <a:rPr lang="en-US" smtClean="0"/>
-              <a:t>4/9/2025</a:t>
+              <a:t>8/27/2026</a:t>
             </a:fld>
             <a:endParaRPr lang="en-US"/>
           </a:p>
@@ -7672,42 +7672,7 @@
                   </a:extLst>
                 </a:hlinkClick>
               </a:rPr>
-              <a:t>https://glitch.com/edit/#!/remix/oval-shared-wealth</a:t>
-            </a:r>
-            <a:endParaRPr lang="en-US" sz="2000" b="1" dirty="0">
-              <a:solidFill>
-                <a:schemeClr val="bg1"/>
-              </a:solidFill>
-            </a:endParaRPr>
-          </a:p>
-          <a:p>
-            <a:pPr marL="42863" indent="0" algn="ctr">
-              <a:buNone/>
-            </a:pPr>
-            <a:endParaRPr lang="en-US" sz="2000" b="1" dirty="0">
-              <a:solidFill>
-                <a:schemeClr val="bg1"/>
-              </a:solidFill>
-            </a:endParaRPr>
-          </a:p>
-          <a:p>
-            <a:pPr marL="42863" indent="0" algn="ctr">
-              <a:buNone/>
-            </a:pPr>
-            <a:r>
-              <a:rPr lang="en-US" sz="2000" b="1" dirty="0">
-                <a:solidFill>
-                  <a:schemeClr val="bg1"/>
-                </a:solidFill>
-                <a:hlinkClick r:id="rId4">
-                  <a:extLst>
-                    <a:ext uri="{A12FA001-AC4F-418D-AE19-62706E023703}">
-                      <ahyp:hlinkClr xmlns:ahyp="http://schemas.microsoft.com/office/drawing/2018/hyperlinkcolor" val="tx"/>
-                    </a:ext>
-                  </a:extLst>
-                </a:hlinkClick>
-              </a:rPr>
-              <a:t>https://stackblitz.com/edit/web-platform-bgy6gtls?file=index.html</a:t>
+              <a:t>https://hytop.onrender.com/e/css-external-stylesheet</a:t>
             </a:r>
             <a:endParaRPr lang="en-US" sz="2000" b="1" dirty="0">
               <a:solidFill>
@@ -9488,9 +9453,7 @@
             <a:r>
               <a:rPr lang="en-US" sz="2800" b="1" dirty="0">
                 <a:solidFill>
-                  <a:schemeClr val="bg1">
-                    <a:lumMod val="95000"/>
-                  </a:schemeClr>
+                  <a:schemeClr val="bg1"/>
                 </a:solidFill>
                 <a:hlinkClick r:id="rId3">
                   <a:extLst>
@@ -9500,13 +9463,11 @@
                   </a:extLst>
                 </a:hlinkClick>
               </a:rPr>
-              <a:t>https://jsfiddle.net/43rhtc20/</a:t>
+              <a:t>https://hytop.onrender.com/e/css-example</a:t>
             </a:r>
             <a:endParaRPr lang="en-US" sz="2800" b="1" dirty="0">
               <a:solidFill>
-                <a:schemeClr val="bg1">
-                  <a:lumMod val="95000"/>
-                </a:schemeClr>
+                <a:schemeClr val="bg1"/>
               </a:solidFill>
             </a:endParaRPr>
           </a:p>
